--- a/project_documents/DS785_Presentation2.pptx
+++ b/project_documents/DS785_Presentation2.pptx
@@ -113,6 +113,11 @@
       </a:defRPr>
     </a:lvl9pPr>
   </p:defaultTextStyle>
+  <p:extLst>
+    <p:ext uri="{EFAFB233-063F-42B5-8137-9DF3F51BA10A}">
+      <p15:sldGuideLst xmlns:p15="http://schemas.microsoft.com/office/powerpoint/2012/main"/>
+    </p:ext>
+  </p:extLst>
 </p:presentation>
 </file>
 
@@ -9929,7 +9934,7 @@
           <a:p>
             <a:fld id="{87F82D20-900E-6C40-A05F-D83DFCD9E8C9}" type="datetimeFigureOut">
               <a:rPr lang="en-US" smtClean="0"/>
-              <a:t>6/19/26</a:t>
+              <a:t>6/24/26</a:t>
             </a:fld>
             <a:endParaRPr lang="en-US"/>
           </a:p>
@@ -10240,36 +10245,6 @@
           <a:bodyPr/>
           <a:lstStyle/>
           <a:p>
-            <a:r>
-              <a:rPr lang="en-US" dirty="0"/>
-              <a:t>Hello everyone. My name is Austin Engstrom, and welcome to Presentation 2 for my project, </a:t>
-            </a:r>
-            <a:r>
-              <a:rPr lang="en-US" sz="1800" b="0" kern="1200" dirty="0">
-                <a:solidFill>
-                  <a:schemeClr val="tx1"/>
-                </a:solidFill>
-                <a:latin typeface="+mn-lt"/>
-                <a:ea typeface="+mn-ea"/>
-                <a:cs typeface="+mn-cs"/>
-              </a:rPr>
-              <a:t>Sentiment Intelligence for Mountain Bike Product Reviews: A comparative NLP Case Study</a:t>
-            </a:r>
-            <a:r>
-              <a:rPr lang="en-US" dirty="0"/>
-              <a:t>.</a:t>
-            </a:r>
-          </a:p>
-          <a:p>
-            <a:endParaRPr lang="en-US" dirty="0"/>
-          </a:p>
-          <a:p>
-            <a:r>
-              <a:rPr lang="en-US" dirty="0"/>
-              <a:t>In this presentation, I will discuss how the review dataset is collected, transformed, and prepared for analysis. Specifically, I will cover the data source, the ETL process used to build the dataset, initial data profiling results, cleaning and preprocessing activities, and the preparation steps that will support future sentiment modeling.</a:t>
-            </a:r>
-          </a:p>
-          <a:p>
             <a:endParaRPr lang="en-US" dirty="0"/>
           </a:p>
         </p:txBody>
@@ -10353,39 +10328,6 @@
         <p:txBody>
           <a:bodyPr/>
           <a:lstStyle/>
-          <a:p>
-            <a:r>
-              <a:rPr lang="en-US" dirty="0"/>
-              <a:t>The primary data source for this project is the Pinkbike Reviews archive. Pinkbike is one of the largest mountain bike media platforms and publishes detailed reviews covering bicycles, suspension components, wheels, tires, protective gear, as well as other components and accessories.</a:t>
-            </a:r>
-          </a:p>
-          <a:p>
-            <a:endParaRPr lang="en-US" dirty="0"/>
-          </a:p>
-          <a:p>
-            <a:r>
-              <a:rPr lang="en-US" dirty="0"/>
-              <a:t>Approximately 300 review article URLs have been identified within the review archive, and more are being posted on a nearly daily basis. These articles provide both structured information, such as publication dates and authors, and unstructured review text that will serve as the foundation for the sentiment analysis portion of the project.</a:t>
-            </a:r>
-          </a:p>
-          <a:p>
-            <a:endParaRPr lang="en-US" dirty="0"/>
-          </a:p>
-          <a:p>
-            <a:r>
-              <a:rPr lang="en-US" dirty="0"/>
-              <a:t>The dataset includes article metadata, full review text, product information, pricing information, and product classifications. The image on the right shows a typical review article from Pinkbike. While readers see this as a webpage, the extraction process converts the article into structured records that can be analyzed using data science and natural language processing techniques.</a:t>
-            </a:r>
-          </a:p>
-          <a:p>
-            <a:endParaRPr lang="en-US" dirty="0"/>
-          </a:p>
-          <a:p>
-            <a:r>
-              <a:rPr lang="en-US" dirty="0"/>
-              <a:t>Because the content is publicly accessible, the project is limited to educational and non-commercial research use and does not collect any personal user information.</a:t>
-            </a:r>
-          </a:p>
           <a:p>
             <a:endParaRPr lang="en-US" dirty="0"/>
           </a:p>
@@ -10471,64 +10413,6 @@
           <a:bodyPr/>
           <a:lstStyle/>
           <a:p>
-            <a:r>
-              <a:rPr lang="en-US" dirty="0"/>
-              <a:t>The dataset is created through a multi-step ETL process consisting of extraction, transformation, and loading activities.</a:t>
-            </a:r>
-          </a:p>
-          <a:p>
-            <a:endParaRPr lang="en-US" dirty="0"/>
-          </a:p>
-          <a:p>
-            <a:r>
-              <a:rPr lang="en-US" dirty="0"/>
-              <a:t>First, Playwright is used to access the Pinkbike review archive, collect review article URLs, and retrieve webpage content. Playwright was selected because it reliably handles modern websites and provides a stable framework for automated collection.</a:t>
-            </a:r>
-          </a:p>
-          <a:p>
-            <a:endParaRPr lang="en-US" dirty="0"/>
-          </a:p>
-          <a:p>
-            <a:r>
-              <a:rPr lang="en-US" dirty="0"/>
-              <a:t>Once webpage content has been retrieved, </a:t>
-            </a:r>
-            <a:r>
-              <a:rPr lang="en-US" dirty="0" err="1"/>
-              <a:t>BeautifulSoup</a:t>
-            </a:r>
-            <a:r>
-              <a:rPr lang="en-US" dirty="0"/>
-              <a:t> parses the HTML structure, removes webpage formatting elements, and extracts both review text and article metadata.</a:t>
-            </a:r>
-          </a:p>
-          <a:p>
-            <a:endParaRPr lang="en-US" dirty="0"/>
-          </a:p>
-          <a:p>
-            <a:r>
-              <a:rPr lang="en-US" dirty="0"/>
-              <a:t>During transformation, additional structured features are generated. These include product categories, brand names, product names, and normalized pricing information.</a:t>
-            </a:r>
-          </a:p>
-          <a:p>
-            <a:endParaRPr lang="en-US" dirty="0"/>
-          </a:p>
-          <a:p>
-            <a:r>
-              <a:rPr lang="en-US" dirty="0"/>
-              <a:t>Finally, the processed records are loaded into a Pandas </a:t>
-            </a:r>
-            <a:r>
-              <a:rPr lang="en-US" dirty="0" err="1"/>
-              <a:t>DataFrame</a:t>
-            </a:r>
-            <a:r>
-              <a:rPr lang="en-US" dirty="0"/>
-              <a:t> and exported to CSV format, creating an analysis-ready dataset. Although the project uses a single external source, data integration occurs by combining review text, metadata, and extracted product attributes into a unified record for each review article.</a:t>
-            </a:r>
-          </a:p>
-          <a:p>
             <a:endParaRPr lang="en-US" dirty="0"/>
           </a:p>
         </p:txBody>
@@ -10612,54 +10496,6 @@
         <p:txBody>
           <a:bodyPr/>
           <a:lstStyle/>
-          <a:p>
-            <a:r>
-              <a:rPr lang="en-US" dirty="0"/>
-              <a:t>After collection and transformation, the dataset was profiled to better understand its structure and overall quality.</a:t>
-            </a:r>
-          </a:p>
-          <a:p>
-            <a:endParaRPr lang="en-US" dirty="0"/>
-          </a:p>
-          <a:p>
-            <a:r>
-              <a:rPr lang="en-US" dirty="0"/>
-              <a:t>The dataset contains both structured and unstructured variables. Structured variables include product information, pricing data, publication dates, and classifications, while the full review text serves as the primary input for future sentiment analysis.</a:t>
-            </a:r>
-          </a:p>
-          <a:p>
-            <a:endParaRPr lang="en-US" dirty="0"/>
-          </a:p>
-          <a:p>
-            <a:r>
-              <a:rPr lang="en-US" dirty="0"/>
-              <a:t>Initial profiling focused on evaluating the completeness of extracted fields, understanding text length distributions, reviewing product category distributions, and identifying missing pricing information.</a:t>
-            </a:r>
-          </a:p>
-          <a:p>
-            <a:endParaRPr lang="en-US" dirty="0"/>
-          </a:p>
-          <a:p>
-            <a:r>
-              <a:rPr lang="en-US" dirty="0"/>
-              <a:t>The table on the right summarizes the major components of the dataset. These components include metadata, product information, classification variables, pricing data, content features, and the review text itself.</a:t>
-            </a:r>
-          </a:p>
-          <a:p>
-            <a:endParaRPr lang="en-US" dirty="0"/>
-          </a:p>
-          <a:p>
-            <a:r>
-              <a:rPr lang="en-US" dirty="0"/>
-              <a:t>The complete dataset currently contains sixteen extracted fields that provide multiple opportunities for segmentation and analysis beyond sentiment prediction alone.</a:t>
-            </a:r>
-          </a:p>
-          <a:p>
-            <a:br>
-              <a:rPr lang="en-US" dirty="0"/>
-            </a:br>
-            <a:endParaRPr lang="en-US" dirty="0"/>
-          </a:p>
           <a:p>
             <a:endParaRPr lang="en-US" dirty="0"/>
           </a:p>
@@ -10745,57 +10581,6 @@
           <a:bodyPr/>
           <a:lstStyle/>
           <a:p>
-            <a:r>
-              <a:rPr lang="en-US" dirty="0"/>
-              <a:t>Following profiling, several cleaning and preprocessing activities were performed to improve consistency and prepare the data for analysis.</a:t>
-            </a:r>
-          </a:p>
-          <a:p>
-            <a:endParaRPr lang="en-US" dirty="0"/>
-          </a:p>
-          <a:p>
-            <a:r>
-              <a:rPr lang="en-US" dirty="0"/>
-              <a:t>HTML and webpage formatting elements were removed to isolate the review content itself. Publication dates and retail pricing values were standardized to create consistent formats across records.</a:t>
-            </a:r>
-          </a:p>
-          <a:p>
-            <a:endParaRPr lang="en-US" dirty="0"/>
-          </a:p>
-          <a:p>
-            <a:r>
-              <a:rPr lang="en-US" dirty="0"/>
-              <a:t>Additional extraction logic was developed to identify product categories, subcategories, brands, and product names. Currency values were normalized, and publication dates were standardized to support future analysis.</a:t>
-            </a:r>
-          </a:p>
-          <a:p>
-            <a:endParaRPr lang="en-US" dirty="0"/>
-          </a:p>
-          <a:p>
-            <a:r>
-              <a:rPr lang="en-US" dirty="0"/>
-              <a:t>Missing pricing information was retained as null values because not all reviews include retail pricing. Data completeness was evaluated across fields, and missing values were identified during profiling.</a:t>
-            </a:r>
-          </a:p>
-          <a:p>
-            <a:endParaRPr lang="en-US" dirty="0"/>
-          </a:p>
-          <a:p>
-            <a:r>
-              <a:rPr lang="en-US" dirty="0"/>
-              <a:t>Variable reduction focused on removing navigation elements, advertising content, and other non-review webpage components that do not contribute to sentiment analysis.</a:t>
-            </a:r>
-          </a:p>
-          <a:p>
-            <a:endParaRPr lang="en-US" dirty="0"/>
-          </a:p>
-          <a:p>
-            <a:r>
-              <a:rPr lang="en-US" dirty="0"/>
-              <a:t>Because the project focuses primarily on textual review content, traditional numeric outlier detection is less applicable. However, article text lengths and pricing distributions were reviewed during profiling to identify potential extraction anomalies.</a:t>
-            </a:r>
-          </a:p>
-          <a:p>
             <a:endParaRPr lang="en-US" dirty="0"/>
           </a:p>
         </p:txBody>
@@ -10880,39 +10665,6 @@
           <a:bodyPr/>
           <a:lstStyle/>
           <a:p>
-            <a:r>
-              <a:rPr lang="en-US" dirty="0"/>
-              <a:t>Several preprocessing activities required for model development will occur after sentiment labels have been generated.</a:t>
-            </a:r>
-          </a:p>
-          <a:p>
-            <a:endParaRPr lang="en-US" dirty="0"/>
-          </a:p>
-          <a:p>
-            <a:r>
-              <a:rPr lang="en-US" dirty="0"/>
-              <a:t>Product categories and brand information will be retained as categorical variables and encoded as needed by the selected modeling approach. Retail pricing information has already been normalized during preprocessing, while additional scaling will be applied only if required by specific machine learning models.</a:t>
-            </a:r>
-          </a:p>
-          <a:p>
-            <a:endParaRPr lang="en-US" dirty="0"/>
-          </a:p>
-          <a:p>
-            <a:r>
-              <a:rPr lang="en-US" dirty="0"/>
-              <a:t>Because sentiment labels have not yet been assigned, class imbalance cannot yet be fully assessed. Once labels are generated, the class distribution will be evaluated and techniques such as class weighting will be considered if necessary.</a:t>
-            </a:r>
-          </a:p>
-          <a:p>
-            <a:endParaRPr lang="en-US" dirty="0"/>
-          </a:p>
-          <a:p>
-            <a:r>
-              <a:rPr lang="en-US" dirty="0"/>
-              <a:t>The workflow shown on the right outlines the planned progression from the completed dataset to sentiment labeling and then to data splitting. The final dataset will be partitioned into training, validation, and testing subsets using a seventy-fifteen-fifteen split to support model development and evaluation.</a:t>
-            </a:r>
-          </a:p>
-          <a:p>
             <a:endParaRPr lang="en-US" dirty="0"/>
           </a:p>
         </p:txBody>
@@ -10996,48 +10748,6 @@
         <p:txBody>
           <a:bodyPr/>
           <a:lstStyle/>
-          <a:p>
-            <a:r>
-              <a:rPr lang="en-US" dirty="0"/>
-              <a:t>This presentation focused on the data collection and preparation phase of the project.</a:t>
-            </a:r>
-          </a:p>
-          <a:p>
-            <a:endParaRPr lang="en-US" dirty="0"/>
-          </a:p>
-          <a:p>
-            <a:r>
-              <a:rPr lang="en-US" dirty="0"/>
-              <a:t>At this stage, the data source has been identified and validated, the ETL pipeline has been developed and tested, the dataset has been profiled, and the initial preprocessing framework has been established.</a:t>
-            </a:r>
-          </a:p>
-          <a:p>
-            <a:endParaRPr lang="en-US" dirty="0"/>
-          </a:p>
-          <a:p>
-            <a:r>
-              <a:rPr lang="en-US" dirty="0"/>
-              <a:t>The next phase of the project will focus on completing dataset collection, generating sentiment labels, conducting exploratory data analysis, and training and evaluating NLP models.</a:t>
-            </a:r>
-          </a:p>
-          <a:p>
-            <a:endParaRPr lang="en-US" dirty="0"/>
-          </a:p>
-          <a:p>
-            <a:r>
-              <a:rPr lang="en-US" dirty="0"/>
-              <a:t>These activities will provide the foundation for comparing sentiment analysis approaches and generating actionable insights from mountain bike product reviews.</a:t>
-            </a:r>
-          </a:p>
-          <a:p>
-            <a:endParaRPr lang="en-US" dirty="0"/>
-          </a:p>
-          <a:p>
-            <a:r>
-              <a:rPr lang="en-US" dirty="0"/>
-              <a:t>Thank you, and I look forward to any questions or feedback.</a:t>
-            </a:r>
-          </a:p>
           <a:p>
             <a:endParaRPr lang="en-US" dirty="0"/>
           </a:p>
@@ -11267,7 +10977,7 @@
           <a:p>
             <a:fld id="{755DF60E-8B57-924B-825F-23BE3BB50F9C}" type="datetimeFigureOut">
               <a:rPr lang="en-US" smtClean="0"/>
-              <a:t>6/19/26</a:t>
+              <a:t>6/24/26</a:t>
             </a:fld>
             <a:endParaRPr lang="en-US"/>
           </a:p>
@@ -11373,6 +11083,13 @@
             <a:noFill/>
           </a:ln>
         </p:spPr>
+        <p:txBody>
+          <a:bodyPr/>
+          <a:lstStyle/>
+          <a:p>
+            <a:endParaRPr lang="en-US"/>
+          </a:p>
+        </p:txBody>
       </p:sp>
       <p:sp>
         <p:nvSpPr>
@@ -11605,7 +11322,7 @@
           <a:p>
             <a:fld id="{755DF60E-8B57-924B-825F-23BE3BB50F9C}" type="datetimeFigureOut">
               <a:rPr lang="en-US" smtClean="0"/>
-              <a:t>6/19/26</a:t>
+              <a:t>6/24/26</a:t>
             </a:fld>
             <a:endParaRPr lang="en-US"/>
           </a:p>
@@ -12006,7 +11723,7 @@
           <a:p>
             <a:fld id="{755DF60E-8B57-924B-825F-23BE3BB50F9C}" type="datetimeFigureOut">
               <a:rPr lang="en-US" smtClean="0"/>
-              <a:t>6/19/26</a:t>
+              <a:t>6/24/26</a:t>
             </a:fld>
             <a:endParaRPr lang="en-US"/>
           </a:p>
@@ -12342,7 +12059,7 @@
           <a:p>
             <a:fld id="{755DF60E-8B57-924B-825F-23BE3BB50F9C}" type="datetimeFigureOut">
               <a:rPr lang="en-US" smtClean="0"/>
-              <a:t>6/19/26</a:t>
+              <a:t>6/24/26</a:t>
             </a:fld>
             <a:endParaRPr lang="en-US"/>
           </a:p>
@@ -12662,7 +12379,7 @@
           <a:p>
             <a:fld id="{755DF60E-8B57-924B-825F-23BE3BB50F9C}" type="datetimeFigureOut">
               <a:rPr lang="en-US" smtClean="0"/>
-              <a:t>6/19/26</a:t>
+              <a:t>6/24/26</a:t>
             </a:fld>
             <a:endParaRPr lang="en-US"/>
           </a:p>
@@ -13058,7 +12775,7 @@
           <a:p>
             <a:fld id="{755DF60E-8B57-924B-825F-23BE3BB50F9C}" type="datetimeFigureOut">
               <a:rPr lang="en-US" smtClean="0"/>
-              <a:t>6/19/26</a:t>
+              <a:t>6/24/26</a:t>
             </a:fld>
             <a:endParaRPr lang="en-US"/>
           </a:p>
@@ -13315,7 +13032,7 @@
           <a:p>
             <a:fld id="{755DF60E-8B57-924B-825F-23BE3BB50F9C}" type="datetimeFigureOut">
               <a:rPr lang="en-US" smtClean="0"/>
-              <a:t>6/19/26</a:t>
+              <a:t>6/24/26</a:t>
             </a:fld>
             <a:endParaRPr lang="en-US"/>
           </a:p>
@@ -13577,7 +13294,7 @@
           <a:p>
             <a:fld id="{755DF60E-8B57-924B-825F-23BE3BB50F9C}" type="datetimeFigureOut">
               <a:rPr lang="en-US" smtClean="0"/>
-              <a:t>6/19/26</a:t>
+              <a:t>6/24/26</a:t>
             </a:fld>
             <a:endParaRPr lang="en-US"/>
           </a:p>
@@ -13839,7 +13556,7 @@
           <a:p>
             <a:fld id="{755DF60E-8B57-924B-825F-23BE3BB50F9C}" type="datetimeFigureOut">
               <a:rPr lang="en-US" smtClean="0"/>
-              <a:t>6/19/26</a:t>
+              <a:t>6/24/26</a:t>
             </a:fld>
             <a:endParaRPr lang="en-US"/>
           </a:p>
@@ -14168,7 +13885,7 @@
           <a:p>
             <a:fld id="{755DF60E-8B57-924B-825F-23BE3BB50F9C}" type="datetimeFigureOut">
               <a:rPr lang="en-US" smtClean="0"/>
-              <a:t>6/19/26</a:t>
+              <a:t>6/24/26</a:t>
             </a:fld>
             <a:endParaRPr lang="en-US"/>
           </a:p>
@@ -14491,7 +14208,7 @@
           <a:p>
             <a:fld id="{755DF60E-8B57-924B-825F-23BE3BB50F9C}" type="datetimeFigureOut">
               <a:rPr lang="en-US" smtClean="0"/>
-              <a:t>6/19/26</a:t>
+              <a:t>6/24/26</a:t>
             </a:fld>
             <a:endParaRPr lang="en-US"/>
           </a:p>
@@ -14597,6 +14314,13 @@
             <a:noFill/>
           </a:ln>
         </p:spPr>
+        <p:txBody>
+          <a:bodyPr/>
+          <a:lstStyle/>
+          <a:p>
+            <a:endParaRPr lang="en-US"/>
+          </a:p>
+        </p:txBody>
       </p:sp>
       <p:sp>
         <p:nvSpPr>
@@ -14948,7 +14672,7 @@
           <a:p>
             <a:fld id="{755DF60E-8B57-924B-825F-23BE3BB50F9C}" type="datetimeFigureOut">
               <a:rPr lang="en-US" smtClean="0"/>
-              <a:t>6/19/26</a:t>
+              <a:t>6/24/26</a:t>
             </a:fld>
             <a:endParaRPr lang="en-US"/>
           </a:p>
@@ -15153,7 +14877,7 @@
           <a:p>
             <a:fld id="{755DF60E-8B57-924B-825F-23BE3BB50F9C}" type="datetimeFigureOut">
               <a:rPr lang="en-US" smtClean="0"/>
-              <a:t>6/19/26</a:t>
+              <a:t>6/24/26</a:t>
             </a:fld>
             <a:endParaRPr lang="en-US"/>
           </a:p>
@@ -15330,7 +15054,7 @@
           <a:p>
             <a:fld id="{755DF60E-8B57-924B-825F-23BE3BB50F9C}" type="datetimeFigureOut">
               <a:rPr lang="en-US" smtClean="0"/>
-              <a:t>6/19/26</a:t>
+              <a:t>6/24/26</a:t>
             </a:fld>
             <a:endParaRPr lang="en-US"/>
           </a:p>
@@ -15663,7 +15387,7 @@
           <a:p>
             <a:fld id="{755DF60E-8B57-924B-825F-23BE3BB50F9C}" type="datetimeFigureOut">
               <a:rPr lang="en-US" smtClean="0"/>
-              <a:t>6/19/26</a:t>
+              <a:t>6/24/26</a:t>
             </a:fld>
             <a:endParaRPr lang="en-US"/>
           </a:p>
@@ -16008,7 +15732,7 @@
           <a:p>
             <a:fld id="{755DF60E-8B57-924B-825F-23BE3BB50F9C}" type="datetimeFigureOut">
               <a:rPr lang="en-US" smtClean="0"/>
-              <a:t>6/19/26</a:t>
+              <a:t>6/24/26</a:t>
             </a:fld>
             <a:endParaRPr lang="en-US"/>
           </a:p>
@@ -16252,6 +15976,13 @@
               <a:noFill/>
             </a:ln>
           </p:spPr>
+          <p:txBody>
+            <a:bodyPr/>
+            <a:lstStyle/>
+            <a:p>
+              <a:endParaRPr lang="en-US"/>
+            </a:p>
+          </p:txBody>
         </p:sp>
         <p:sp>
           <p:nvSpPr>
@@ -16318,6 +16049,13 @@
               <a:noFill/>
             </a:ln>
           </p:spPr>
+          <p:txBody>
+            <a:bodyPr/>
+            <a:lstStyle/>
+            <a:p>
+              <a:endParaRPr lang="en-US"/>
+            </a:p>
+          </p:txBody>
         </p:sp>
         <p:sp>
           <p:nvSpPr>
@@ -16389,6 +16127,13 @@
               <a:noFill/>
             </a:ln>
           </p:spPr>
+          <p:txBody>
+            <a:bodyPr/>
+            <a:lstStyle/>
+            <a:p>
+              <a:endParaRPr lang="en-US"/>
+            </a:p>
+          </p:txBody>
         </p:sp>
         <p:sp>
           <p:nvSpPr>
@@ -16440,6 +16185,13 @@
               <a:noFill/>
             </a:ln>
           </p:spPr>
+          <p:txBody>
+            <a:bodyPr/>
+            <a:lstStyle/>
+            <a:p>
+              <a:endParaRPr lang="en-US"/>
+            </a:p>
+          </p:txBody>
         </p:sp>
         <p:sp>
           <p:nvSpPr>
@@ -16526,6 +16278,13 @@
               <a:noFill/>
             </a:ln>
           </p:spPr>
+          <p:txBody>
+            <a:bodyPr/>
+            <a:lstStyle/>
+            <a:p>
+              <a:endParaRPr lang="en-US"/>
+            </a:p>
+          </p:txBody>
         </p:sp>
         <p:sp>
           <p:nvSpPr>
@@ -16607,6 +16366,13 @@
               <a:noFill/>
             </a:ln>
           </p:spPr>
+          <p:txBody>
+            <a:bodyPr/>
+            <a:lstStyle/>
+            <a:p>
+              <a:endParaRPr lang="en-US"/>
+            </a:p>
+          </p:txBody>
         </p:sp>
         <p:sp>
           <p:nvSpPr>
@@ -16668,6 +16434,13 @@
               <a:noFill/>
             </a:ln>
           </p:spPr>
+          <p:txBody>
+            <a:bodyPr/>
+            <a:lstStyle/>
+            <a:p>
+              <a:endParaRPr lang="en-US"/>
+            </a:p>
+          </p:txBody>
         </p:sp>
         <p:sp>
           <p:nvSpPr>
@@ -16749,6 +16522,13 @@
               <a:noFill/>
             </a:ln>
           </p:spPr>
+          <p:txBody>
+            <a:bodyPr/>
+            <a:lstStyle/>
+            <a:p>
+              <a:endParaRPr lang="en-US"/>
+            </a:p>
+          </p:txBody>
         </p:sp>
         <p:sp>
           <p:nvSpPr>
@@ -16865,6 +16645,13 @@
               <a:noFill/>
             </a:ln>
           </p:spPr>
+          <p:txBody>
+            <a:bodyPr/>
+            <a:lstStyle/>
+            <a:p>
+              <a:endParaRPr lang="en-US"/>
+            </a:p>
+          </p:txBody>
         </p:sp>
         <p:sp>
           <p:nvSpPr>
@@ -16916,6 +16703,13 @@
               <a:noFill/>
             </a:ln>
           </p:spPr>
+          <p:txBody>
+            <a:bodyPr/>
+            <a:lstStyle/>
+            <a:p>
+              <a:endParaRPr lang="en-US"/>
+            </a:p>
+          </p:txBody>
         </p:sp>
         <p:sp>
           <p:nvSpPr>
@@ -16977,6 +16771,13 @@
               <a:noFill/>
             </a:ln>
           </p:spPr>
+          <p:txBody>
+            <a:bodyPr/>
+            <a:lstStyle/>
+            <a:p>
+              <a:endParaRPr lang="en-US"/>
+            </a:p>
+          </p:txBody>
         </p:sp>
         <p:sp>
           <p:nvSpPr>
@@ -17048,6 +16849,13 @@
               <a:noFill/>
             </a:ln>
           </p:spPr>
+          <p:txBody>
+            <a:bodyPr/>
+            <a:lstStyle/>
+            <a:p>
+              <a:endParaRPr lang="en-US"/>
+            </a:p>
+          </p:txBody>
         </p:sp>
       </p:grpSp>
       <p:grpSp>
@@ -17167,6 +16975,13 @@
               <a:noFill/>
             </a:ln>
           </p:spPr>
+          <p:txBody>
+            <a:bodyPr/>
+            <a:lstStyle/>
+            <a:p>
+              <a:endParaRPr lang="en-US"/>
+            </a:p>
+          </p:txBody>
         </p:sp>
         <p:sp>
           <p:nvSpPr>
@@ -17236,6 +17051,13 @@
               <a:noFill/>
             </a:ln>
           </p:spPr>
+          <p:txBody>
+            <a:bodyPr/>
+            <a:lstStyle/>
+            <a:p>
+              <a:endParaRPr lang="en-US"/>
+            </a:p>
+          </p:txBody>
         </p:sp>
         <p:sp>
           <p:nvSpPr>
@@ -17305,6 +17127,13 @@
               <a:noFill/>
             </a:ln>
           </p:spPr>
+          <p:txBody>
+            <a:bodyPr/>
+            <a:lstStyle/>
+            <a:p>
+              <a:endParaRPr lang="en-US"/>
+            </a:p>
+          </p:txBody>
         </p:sp>
         <p:sp>
           <p:nvSpPr>
@@ -17389,6 +17218,13 @@
               <a:noFill/>
             </a:ln>
           </p:spPr>
+          <p:txBody>
+            <a:bodyPr/>
+            <a:lstStyle/>
+            <a:p>
+              <a:endParaRPr lang="en-US"/>
+            </a:p>
+          </p:txBody>
         </p:sp>
         <p:sp>
           <p:nvSpPr>
@@ -17483,6 +17319,13 @@
               <a:noFill/>
             </a:ln>
           </p:spPr>
+          <p:txBody>
+            <a:bodyPr/>
+            <a:lstStyle/>
+            <a:p>
+              <a:endParaRPr lang="en-US"/>
+            </a:p>
+          </p:txBody>
         </p:sp>
         <p:sp>
           <p:nvSpPr>
@@ -17532,6 +17375,13 @@
               <a:noFill/>
             </a:ln>
           </p:spPr>
+          <p:txBody>
+            <a:bodyPr/>
+            <a:lstStyle/>
+            <a:p>
+              <a:endParaRPr lang="en-US"/>
+            </a:p>
+          </p:txBody>
         </p:sp>
         <p:sp>
           <p:nvSpPr>
@@ -17596,6 +17446,13 @@
               <a:noFill/>
             </a:ln>
           </p:spPr>
+          <p:txBody>
+            <a:bodyPr/>
+            <a:lstStyle/>
+            <a:p>
+              <a:endParaRPr lang="en-US"/>
+            </a:p>
+          </p:txBody>
         </p:sp>
         <p:sp>
           <p:nvSpPr>
@@ -17705,6 +17562,13 @@
               <a:noFill/>
             </a:ln>
           </p:spPr>
+          <p:txBody>
+            <a:bodyPr/>
+            <a:lstStyle/>
+            <a:p>
+              <a:endParaRPr lang="en-US"/>
+            </a:p>
+          </p:txBody>
         </p:sp>
         <p:sp>
           <p:nvSpPr>
@@ -17754,6 +17618,13 @@
               <a:noFill/>
             </a:ln>
           </p:spPr>
+          <p:txBody>
+            <a:bodyPr/>
+            <a:lstStyle/>
+            <a:p>
+              <a:endParaRPr lang="en-US"/>
+            </a:p>
+          </p:txBody>
         </p:sp>
         <p:sp>
           <p:nvSpPr>
@@ -17823,6 +17694,13 @@
               <a:noFill/>
             </a:ln>
           </p:spPr>
+          <p:txBody>
+            <a:bodyPr/>
+            <a:lstStyle/>
+            <a:p>
+              <a:endParaRPr lang="en-US"/>
+            </a:p>
+          </p:txBody>
         </p:sp>
         <p:sp>
           <p:nvSpPr>
@@ -17887,6 +17765,13 @@
               <a:noFill/>
             </a:ln>
           </p:spPr>
+          <p:txBody>
+            <a:bodyPr/>
+            <a:lstStyle/>
+            <a:p>
+              <a:endParaRPr lang="en-US"/>
+            </a:p>
+          </p:txBody>
         </p:sp>
         <p:sp>
           <p:nvSpPr>
@@ -17956,6 +17841,13 @@
               <a:noFill/>
             </a:ln>
           </p:spPr>
+          <p:txBody>
+            <a:bodyPr/>
+            <a:lstStyle/>
+            <a:p>
+              <a:endParaRPr lang="en-US"/>
+            </a:p>
+          </p:txBody>
         </p:sp>
       </p:grpSp>
       <p:sp>
@@ -17994,6 +17886,13 @@
             <a:schemeClr val="lt1"/>
           </a:fontRef>
         </p:style>
+        <p:txBody>
+          <a:bodyPr/>
+          <a:lstStyle/>
+          <a:p>
+            <a:endParaRPr lang="en-US"/>
+          </a:p>
+        </p:txBody>
       </p:sp>
       <p:sp>
         <p:nvSpPr>
@@ -18125,7 +18024,7 @@
           <a:p>
             <a:fld id="{755DF60E-8B57-924B-825F-23BE3BB50F9C}" type="datetimeFigureOut">
               <a:rPr lang="en-US" smtClean="0"/>
-              <a:t>6/19/26</a:t>
+              <a:t>6/24/26</a:t>
             </a:fld>
             <a:endParaRPr lang="en-US"/>
           </a:p>
@@ -21345,7 +21244,7 @@
         </p:spPr>
         <p:txBody>
           <a:bodyPr vert="horz" lIns="91440" tIns="45720" rIns="91440" bIns="45720" rtlCol="0">
-            <a:normAutofit fontScale="85000" lnSpcReduction="20000"/>
+            <a:normAutofit fontScale="92500" lnSpcReduction="10000"/>
           </a:bodyPr>
           <a:lstStyle/>
           <a:p>
@@ -21415,7 +21314,11 @@
               </a:lnSpc>
             </a:pPr>
             <a:r>
-              <a:rPr lang="en-US" sz="900" dirty="0"/>
+              <a:rPr lang="en-US" sz="900" dirty="0">
+                <a:solidFill>
+                  <a:schemeClr val="tx1"/>
+                </a:solidFill>
+              </a:rPr>
               <a:t>~300 review article URLs identified</a:t>
             </a:r>
           </a:p>
@@ -21447,21 +21350,6 @@
                 </a:solidFill>
               </a:rPr>
               <a:t>Publicly accessible review content </a:t>
-            </a:r>
-          </a:p>
-          <a:p>
-            <a:pPr>
-              <a:lnSpc>
-                <a:spcPct val="90000"/>
-              </a:lnSpc>
-            </a:pPr>
-            <a:r>
-              <a:rPr lang="en-US" sz="900" dirty="0">
-                <a:solidFill>
-                  <a:schemeClr val="tx1"/>
-                </a:solidFill>
-              </a:rPr>
-              <a:t>~300 review articles URLs identified </a:t>
             </a:r>
           </a:p>
           <a:p>
@@ -21603,14 +21491,13 @@
               </a:lnSpc>
             </a:pPr>
             <a:r>
-              <a:rPr lang="en-US" sz="900" dirty="0"/>
+              <a:rPr lang="en-US" sz="900" dirty="0">
+                <a:solidFill>
+                  <a:schemeClr val="tx1"/>
+                </a:solidFill>
+              </a:rPr>
               <a:t>Educational and non-commercial research use</a:t>
             </a:r>
-            <a:endParaRPr lang="en-US" sz="900" dirty="0">
-              <a:solidFill>
-                <a:schemeClr val="tx1"/>
-              </a:solidFill>
-            </a:endParaRPr>
           </a:p>
           <a:p>
             <a:pPr>
@@ -25245,7 +25132,7 @@
                   <a:schemeClr val="tx1"/>
                 </a:solidFill>
               </a:rPr>
-              <a:t>Normalize currency values</a:t>
+              <a:t>Normalized currency values</a:t>
             </a:r>
           </a:p>
           <a:p>
@@ -25255,7 +25142,7 @@
                   <a:schemeClr val="tx1"/>
                 </a:solidFill>
               </a:rPr>
-              <a:t>Standardize publication dates</a:t>
+              <a:t>Standardized publication dates</a:t>
             </a:r>
             <a:endParaRPr lang="en-US" dirty="0"/>
           </a:p>
